--- a/entregables/resultados_final/Presentacion_Final_Resultados.pptx
+++ b/entregables/resultados_final/Presentacion_Final_Resultados.pptx
@@ -1873,14 +1873,14 @@
       </p:pic>
       <p:pic>
         <p:nvPicPr>
-          <p:cNvPr id="6" name="Picture 5" descr="figura_comparacion_presentacion.png"/>
+          <p:cNvPr id="6" name="Picture 5" descr="resultados_prueba.png"/>
           <p:cNvPicPr>
             <a:picLocks noChangeAspect="1"/>
           </p:cNvPicPr>
           <p:nvPr/>
         </p:nvPicPr>
         <p:blipFill>
-          <a:blip r:embed="rId4"/>
+          <a:blip r:embed="rId5"/>
           <a:stretch>
             <a:fillRect/>
           </a:stretch>
@@ -4080,7 +4080,7 @@
                 <a:ea typeface="Comfortaa Bold" pitchFamily="34" charset="-122"/>
                 <a:cs typeface="Comfortaa Bold" pitchFamily="34" charset="-120"/>
               </a:rPr>
-              <a:t>Datos, limpieza e ingeniería de variables</a:t>
+              <a:t>Datos y selección de variables</a:t>
             </a:r>
             <a:endParaRPr lang="en-US" sz="3050" dirty="0"/>
           </a:p>
@@ -4122,7 +4122,7 @@
                 <a:ea typeface="Comfortaa Bold" pitchFamily="34" charset="-122"/>
                 <a:cs typeface="Comfortaa Bold" pitchFamily="34" charset="-120"/>
               </a:rPr>
-              <a:t>Cuatro archivos principales</a:t>
+              <a:t>Fuentes de Tmall</a:t>
             </a:r>
             <a:endParaRPr lang="en-US" sz="1500" dirty="0"/>
           </a:p>
@@ -4159,7 +4159,7 @@
               <a:buChar char="•"/>
             </a:pPr>
             <a:r>
-              <a:rPr lang="en-US" sz="1350" dirty="0">
+              <a:rPr lang="en-US" sz="1500" dirty="0">
                 <a:solidFill>
                   <a:srgbClr val="D7D4CC"/>
                 </a:solidFill>
@@ -4167,10 +4167,7 @@
                 <a:ea typeface="Raleway Medium" pitchFamily="34" charset="-122"/>
                 <a:cs typeface="Raleway Medium" pitchFamily="34" charset="-120"/>
               </a:rPr>
-              <a:t>train_format1.csv: 260 864 pares etiquetados
-test_format1.csv: 261 477 pares sin etiqueta
-user_info_format1.csv: 424 170 usuarios
-user_log_format1.csv: 54 925 330 eventos</a:t>
+              <a:t>260 864 pares etiquetados</a:t>
             </a:r>
             <a:endParaRPr lang="en-US" sz="1350" dirty="0"/>
           </a:p>
@@ -4183,7 +4180,7 @@
               <a:buChar char="•"/>
             </a:pPr>
             <a:r>
-              <a:rPr lang="en-US" sz="1350" dirty="0">
+              <a:rPr lang="en-US" sz="1500" dirty="0">
                 <a:solidFill>
                   <a:srgbClr val="D7D4CC"/>
                 </a:solidFill>
@@ -4191,7 +4188,7 @@
                 <a:ea typeface="Raleway Medium" pitchFamily="34" charset="-122"/>
                 <a:cs typeface="Raleway Medium" pitchFamily="34" charset="-120"/>
               </a:rPr>
-              <a:t/>
+              <a:t>261 477 pares sin etiqueta</a:t>
             </a:r>
             <a:endParaRPr lang="en-US" sz="1350" dirty="0"/>
           </a:p>
@@ -4204,7 +4201,7 @@
               <a:buChar char="•"/>
             </a:pPr>
             <a:r>
-              <a:rPr lang="en-US" sz="1350" dirty="0">
+              <a:rPr lang="en-US" sz="1500" dirty="0">
                 <a:solidFill>
                   <a:srgbClr val="D7D4CC"/>
                 </a:solidFill>
@@ -4212,7 +4209,7 @@
                 <a:ea typeface="Raleway Medium" pitchFamily="34" charset="-122"/>
                 <a:cs typeface="Raleway Medium" pitchFamily="34" charset="-120"/>
               </a:rPr>
-              <a:t/>
+              <a:t>424 170 perfiles de usuario</a:t>
             </a:r>
             <a:endParaRPr lang="en-US" sz="1350" dirty="0"/>
           </a:p>
@@ -4225,7 +4222,7 @@
               <a:buChar char="•"/>
             </a:pPr>
             <a:r>
-              <a:rPr lang="en-US" sz="1350" dirty="0">
+              <a:rPr lang="en-US" sz="1500" dirty="0">
                 <a:solidFill>
                   <a:srgbClr val="D7D4CC"/>
                 </a:solidFill>
@@ -4233,7 +4230,7 @@
                 <a:ea typeface="Raleway Medium" pitchFamily="34" charset="-122"/>
                 <a:cs typeface="Raleway Medium" pitchFamily="34" charset="-120"/>
               </a:rPr>
-              <a:t/>
+              <a:t>54 925 330 acciones</a:t>
             </a:r>
             <a:endParaRPr lang="en-US" sz="1350" dirty="0"/>
           </a:p>
@@ -4246,7 +4243,7 @@
               <a:buChar char="•"/>
             </a:pPr>
             <a:r>
-              <a:rPr lang="en-US" sz="1350" dirty="0">
+              <a:rPr lang="en-US" sz="1500" dirty="0">
                 <a:solidFill>
                   <a:srgbClr val="D7D4CC"/>
                 </a:solidFill>
@@ -4296,7 +4293,7 @@
                 <a:ea typeface="Comfortaa Bold" pitchFamily="34" charset="-122"/>
                 <a:cs typeface="Comfortaa Bold" pitchFamily="34" charset="-120"/>
               </a:rPr>
-              <a:t>Tabla para modelar</a:t>
+              <a:t>Entradas al modelo</a:t>
             </a:r>
             <a:endParaRPr lang="en-US" sz="1500" dirty="0"/>
           </a:p>
@@ -4333,7 +4330,7 @@
               <a:buChar char="•"/>
             </a:pPr>
             <a:r>
-              <a:rPr lang="en-US" sz="1350" dirty="0">
+              <a:rPr lang="en-US" sz="1500" dirty="0">
                 <a:solidFill>
                   <a:srgbClr val="D7D4CC"/>
                 </a:solidFill>
@@ -4341,8 +4338,7 @@
                 <a:ea typeface="Raleway Medium" pitchFamily="34" charset="-122"/>
                 <a:cs typeface="Raleway Medium" pitchFamily="34" charset="-120"/>
               </a:rPr>
-              <a:t>64 variables analíticas sin etiqueta
-+ merchant_id codificado = 65 entradas</a:t>
+              <a:t>64 variables construidas</a:t>
             </a:r>
             <a:endParaRPr lang="en-US" sz="1350" dirty="0"/>
           </a:p>
@@ -4355,7 +4351,7 @@
               <a:buChar char="•"/>
             </a:pPr>
             <a:r>
-              <a:rPr lang="en-US" sz="1350" dirty="0">
+              <a:rPr lang="en-US" sz="1500" dirty="0">
                 <a:solidFill>
                   <a:srgbClr val="D7D4CC"/>
                 </a:solidFill>
@@ -4363,7 +4359,7 @@
                 <a:ea typeface="Raleway Medium" pitchFamily="34" charset="-122"/>
                 <a:cs typeface="Raleway Medium" pitchFamily="34" charset="-120"/>
               </a:rPr>
-              <a:t/>
+              <a:t>+ vendedor codificado = 65 entradas</a:t>
             </a:r>
             <a:endParaRPr lang="en-US" sz="1350" dirty="0"/>
           </a:p>
@@ -4376,7 +4372,7 @@
               <a:buChar char="•"/>
             </a:pPr>
             <a:r>
-              <a:rPr lang="en-US" sz="1350" dirty="0">
+              <a:rPr lang="en-US" sz="1500" dirty="0">
                 <a:solidFill>
                   <a:srgbClr val="D7D4CC"/>
                 </a:solidFill>
@@ -4426,7 +4422,7 @@
                 <a:ea typeface="Comfortaa Bold" pitchFamily="34" charset="-122"/>
                 <a:cs typeface="Comfortaa Bold" pitchFamily="34" charset="-120"/>
               </a:rPr>
-              <a:t>Control de calidad y fuga</a:t>
+              <a:t>Justificación y control de fuga</a:t>
             </a:r>
             <a:endParaRPr lang="en-US" sz="1500" dirty="0"/>
           </a:p>
@@ -4463,7 +4459,7 @@
               <a:buChar char="•"/>
             </a:pPr>
             <a:r>
-              <a:rPr lang="en-US" sz="1350" dirty="0">
+              <a:rPr lang="en-US" sz="1500" dirty="0">
                 <a:solidFill>
                   <a:srgbClr val="D7D4CC"/>
                 </a:solidFill>
@@ -4471,10 +4467,7 @@
                 <a:ea typeface="Raleway Medium" pitchFamily="34" charset="-122"/>
                 <a:cs typeface="Raleway Medium" pitchFamily="34" charset="-120"/>
               </a:rPr>
-              <a:t>Duplicados del log conservados por falta de hora
-Faltantes de marca excluidos solo de diversidad
-Partición por usuario: 208 691 / 52 173 pares
-Codificación de vendedor ajustada dentro de cada pliegue</a:t>
+              <a:t>Actividad y diversidad: asociación observada en el EDA</a:t>
             </a:r>
             <a:endParaRPr lang="en-US" sz="1350" dirty="0"/>
           </a:p>
@@ -4487,7 +4480,7 @@
               <a:buChar char="•"/>
             </a:pPr>
             <a:r>
-              <a:rPr lang="en-US" sz="1350" dirty="0">
+              <a:rPr lang="en-US" sz="1500" dirty="0">
                 <a:solidFill>
                   <a:srgbClr val="D7D4CC"/>
                 </a:solidFill>
@@ -4495,7 +4488,7 @@
                 <a:ea typeface="Raleway Medium" pitchFamily="34" charset="-122"/>
                 <a:cs typeface="Raleway Medium" pitchFamily="34" charset="-120"/>
               </a:rPr>
-              <a:t/>
+              <a:t>Fidelidad del vendedor: AUC individual 0,622</a:t>
             </a:r>
             <a:endParaRPr lang="en-US" sz="1350" dirty="0"/>
           </a:p>
@@ -4508,7 +4501,7 @@
               <a:buChar char="•"/>
             </a:pPr>
             <a:r>
-              <a:rPr lang="en-US" sz="1350" dirty="0">
+              <a:rPr lang="en-US" sz="1500" dirty="0">
                 <a:solidFill>
                   <a:srgbClr val="D7D4CC"/>
                 </a:solidFill>
@@ -4516,7 +4509,7 @@
                 <a:ea typeface="Raleway Medium" pitchFamily="34" charset="-122"/>
                 <a:cs typeface="Raleway Medium" pitchFamily="34" charset="-120"/>
               </a:rPr>
-              <a:t/>
+              <a:t>Señales del par hasta 11/11; codificación sin fuga</a:t>
             </a:r>
             <a:endParaRPr lang="en-US" sz="1350" dirty="0"/>
           </a:p>
@@ -4529,7 +4522,7 @@
               <a:buChar char="•"/>
             </a:pPr>
             <a:r>
-              <a:rPr lang="en-US" sz="1350" dirty="0">
+              <a:rPr lang="en-US" sz="1500" dirty="0">
                 <a:solidFill>
                   <a:srgbClr val="D7D4CC"/>
                 </a:solidFill>
@@ -4575,22 +4568,22 @@
       </p:pic>
       <p:pic>
         <p:nvPicPr>
-          <p:cNvPr id="14" name="Picture 13" descr="17_auc_individual_variables.png"/>
+          <p:cNvPr id="14" name="Picture 13" descr="features.png"/>
           <p:cNvPicPr>
             <a:picLocks noChangeAspect="1"/>
           </p:cNvPicPr>
           <p:nvPr/>
         </p:nvPicPr>
         <p:blipFill>
-          <a:blip r:embed="rId5"/>
+          <a:blip r:embed="rId6"/>
           <a:stretch>
             <a:fillRect/>
           </a:stretch>
         </p:blipFill>
         <p:spPr>
           <a:xfrm>
-            <a:off x="6662748" y="1489028"/>
-            <a:ext cx="2831317" cy="2544359"/>
+            <a:off x="4498848" y="1490472"/>
+            <a:ext cx="7150608" cy="2542032"/>
           </a:xfrm>
           <a:prstGeom prst="rect">
             <a:avLst/>
@@ -5330,7 +5323,7 @@
                 <a:ea typeface="Comfortaa Bold" pitchFamily="34" charset="-122"/>
                 <a:cs typeface="Comfortaa Bold" pitchFamily="34" charset="-120"/>
               </a:rPr>
-              <a:t>El ajuste mejora sobre todo a Random Forest</a:t>
+              <a:t>Modelos y ajuste de hiperparámetros</a:t>
             </a:r>
             <a:endParaRPr lang="en-US" sz="3200" dirty="0"/>
           </a:p>
@@ -5372,7 +5365,7 @@
                 <a:ea typeface="Comfortaa Bold" pitchFamily="34" charset="-122"/>
                 <a:cs typeface="Comfortaa Bold" pitchFamily="34" charset="-120"/>
               </a:rPr>
-              <a:t>AUC-ROC en validación</a:t>
+              <a:t>Modelos y parámetros clave</a:t>
             </a:r>
             <a:endParaRPr lang="en-US" sz="1600" dirty="0"/>
           </a:p>
@@ -5417,9 +5410,7 @@
                 <a:ea typeface="Raleway Medium" pitchFamily="34" charset="-122"/>
                 <a:cs typeface="Raleway Medium" pitchFamily="34" charset="-120"/>
               </a:rPr>
-              <a:t>Regresión logística: 0,6911 → 0,6915
-Random Forest: 0,6496 → 0,6903
-LightGBM: 0,6863 → 0,6931</a:t>
+              <a:t>Logística: lineal; C = 0,00127</a:t>
             </a:r>
             <a:r>
               <a:rPr lang="en-US" sz="1400" b="1" dirty="0">
@@ -5462,7 +5453,7 @@
                 <a:ea typeface="Raleway Medium" pitchFamily="34" charset="-122"/>
                 <a:cs typeface="Raleway Medium" pitchFamily="34" charset="-120"/>
               </a:rPr>
-              <a:t/>
+              <a:t>Forest: árboles; mínimo 167 por hoja</a:t>
             </a:r>
             <a:r>
               <a:rPr lang="en-US" sz="1400" b="1" dirty="0">
@@ -5505,7 +5496,7 @@
                 <a:ea typeface="Raleway Medium" pitchFamily="34" charset="-122"/>
                 <a:cs typeface="Raleway Medium" pitchFamily="34" charset="-120"/>
               </a:rPr>
-              <a:t/>
+              <a:t>LightGBM: boosting; tasa = 0,0078</a:t>
             </a:r>
             <a:endParaRPr lang="en-US" sz="1400" dirty="0"/>
           </a:p>
@@ -5547,7 +5538,7 @@
                 <a:ea typeface="Comfortaa Bold" pitchFamily="34" charset="-122"/>
                 <a:cs typeface="Comfortaa Bold" pitchFamily="34" charset="-120"/>
               </a:rPr>
-              <a:t>Selección del modelo</a:t>
+              <a:t>AUC-ROC en validación</a:t>
             </a:r>
             <a:endParaRPr lang="en-US" sz="1600" dirty="0"/>
           </a:p>
@@ -5592,7 +5583,7 @@
                 <a:ea typeface="Raleway Medium" pitchFamily="34" charset="-122"/>
                 <a:cs typeface="Raleway Medium" pitchFamily="34" charset="-120"/>
               </a:rPr>
-              <a:t>LightGBM tuvo mejor AUC en validación y menor variación entre pliegues. La regresión logística siguió muy cerca; la mejora de complejidad es pequeña.</a:t>
+              <a:t>Logística: 0,6911 → 0,6915</a:t>
             </a:r>
             <a:endParaRPr lang="en-US" sz="1400" dirty="0"/>
           </a:p>
@@ -5613,7 +5604,7 @@
                 <a:ea typeface="Raleway Medium" pitchFamily="34" charset="-122"/>
                 <a:cs typeface="Raleway Medium" pitchFamily="34" charset="-120"/>
               </a:rPr>
-              <a:t/>
+              <a:t>Forest: 0,6496 → 0,6903</a:t>
             </a:r>
             <a:endParaRPr lang="en-US" sz="1400" dirty="0"/>
           </a:p>
@@ -5634,7 +5625,7 @@
                 <a:ea typeface="Raleway Medium" pitchFamily="34" charset="-122"/>
                 <a:cs typeface="Raleway Medium" pitchFamily="34" charset="-120"/>
               </a:rPr>
-              <a:t/>
+              <a:t>LightGBM: 0,6863 → 0,6931</a:t>
             </a:r>
             <a:endParaRPr lang="en-US" sz="1400" dirty="0"/>
           </a:p>
@@ -5672,22 +5663,22 @@
       </p:pic>
       <p:pic>
         <p:nvPicPr>
-          <p:cNvPr id="14" name="Picture 13" descr="18_ajuste_hiperparametros.png"/>
+          <p:cNvPr id="14" name="Picture 13" descr="ajuste.png"/>
           <p:cNvPicPr>
             <a:picLocks noChangeAspect="1"/>
           </p:cNvPicPr>
           <p:nvPr/>
         </p:nvPicPr>
         <p:blipFill>
-          <a:blip r:embed="rId5"/>
+          <a:blip r:embed="rId6"/>
           <a:stretch>
             <a:fillRect/>
           </a:stretch>
         </p:blipFill>
         <p:spPr>
           <a:xfrm>
-            <a:off x="1267515" y="3218608"/>
-            <a:ext cx="5367746" cy="1909679"/>
+            <a:off x="1271016" y="2048256"/>
+            <a:ext cx="5367528" cy="4261104"/>
           </a:xfrm>
           <a:prstGeom prst="rect">
             <a:avLst/>
@@ -5848,7 +5839,7 @@
               <a:buChar char="•"/>
             </a:pPr>
             <a:r>
-              <a:rPr lang="en-US" sz="1200" dirty="0">
+              <a:rPr lang="en-US" sz="1400" dirty="0">
                 <a:solidFill>
                   <a:srgbClr val="D7D4CC"/>
                 </a:solidFill>
@@ -5856,10 +5847,7 @@
                 <a:ea typeface="Raleway Medium" pitchFamily="34" charset="-122"/>
                 <a:cs typeface="Raleway Medium" pitchFamily="34" charset="-120"/>
               </a:rPr>
-              <a:t>Logística: 0,6892 / 0,1367
-Random Forest: 0,6857 / 0,1343
-LightGBM: 0,6893 / 0,1389
-Ensamble: 0,6907 / 0,1388</a:t>
+              <a:t>Logística: 0,6892 / 0,1367</a:t>
             </a:r>
             <a:endParaRPr lang="en-US" sz="1200" dirty="0"/>
           </a:p>
@@ -5872,7 +5860,7 @@
               <a:buChar char="•"/>
             </a:pPr>
             <a:r>
-              <a:rPr lang="en-US" sz="1200" dirty="0">
+              <a:rPr lang="en-US" sz="1400" dirty="0">
                 <a:solidFill>
                   <a:srgbClr val="D7D4CC"/>
                 </a:solidFill>
@@ -5880,7 +5868,7 @@
                 <a:ea typeface="Raleway Medium" pitchFamily="34" charset="-122"/>
                 <a:cs typeface="Raleway Medium" pitchFamily="34" charset="-120"/>
               </a:rPr>
-              <a:t/>
+              <a:t>Forest: 0,6857 / 0,1343</a:t>
             </a:r>
             <a:r>
               <a:rPr lang="en-US" sz="1200" b="1" dirty="0">
@@ -5926,7 +5914,7 @@
               <a:buChar char="•"/>
             </a:pPr>
             <a:r>
-              <a:rPr lang="en-US" sz="1200" dirty="0">
+              <a:rPr lang="en-US" sz="1400" dirty="0">
                 <a:solidFill>
                   <a:srgbClr val="D7D4CC"/>
                 </a:solidFill>
@@ -5934,7 +5922,7 @@
                 <a:ea typeface="Raleway Medium" pitchFamily="34" charset="-122"/>
                 <a:cs typeface="Raleway Medium" pitchFamily="34" charset="-120"/>
               </a:rPr>
-              <a:t/>
+              <a:t>LightGBM: 0,6893 / 0,1389</a:t>
             </a:r>
             <a:r>
               <a:rPr lang="en-US" sz="1200" b="1" dirty="0">
@@ -5980,7 +5968,7 @@
               <a:buChar char="•"/>
             </a:pPr>
             <a:r>
-              <a:rPr lang="en-US" sz="1200" dirty="0">
+              <a:rPr lang="en-US" sz="1400" dirty="0">
                 <a:solidFill>
                   <a:srgbClr val="D7D4CC"/>
                 </a:solidFill>
@@ -5988,7 +5976,7 @@
                 <a:ea typeface="Raleway Medium" pitchFamily="34" charset="-122"/>
                 <a:cs typeface="Raleway Medium" pitchFamily="34" charset="-120"/>
               </a:rPr>
-              <a:t/>
+              <a:t>Ensamble: 0,6907 / 0,1388</a:t>
             </a:r>
             <a:endParaRPr lang="en-US" sz="1200" dirty="0"/>
           </a:p>
@@ -6066,7 +6054,7 @@
               <a:buNone/>
             </a:pPr>
             <a:r>
-              <a:rPr lang="en-US" sz="1200" dirty="0">
+              <a:rPr lang="en-US" sz="1400" dirty="0">
                 <a:solidFill>
                   <a:srgbClr val="D7D4CC"/>
                 </a:solidFill>
@@ -6074,7 +6062,7 @@
                 <a:ea typeface="Raleway Medium" pitchFamily="34" charset="-122"/>
                 <a:cs typeface="Raleway Medium" pitchFamily="34" charset="-120"/>
               </a:rPr>
-              <a:t>Las diferencias de AUC-ROC son menores de 0,005. No se estimó incertidumbre estadística.</a:t>
+              <a:t>Brecha máxima ≈0,005; sin prueba estadística.</a:t>
             </a:r>
             <a:endParaRPr lang="en-US" sz="1200" dirty="0"/>
           </a:p>
@@ -6163,7 +6151,7 @@
               <a:buNone/>
             </a:pPr>
             <a:r>
-              <a:rPr lang="en-US" sz="1200" dirty="0">
+              <a:rPr lang="en-US" sz="1400" dirty="0">
                 <a:solidFill>
                   <a:srgbClr val="FFFFFF"/>
                 </a:solidFill>
